--- a/docs/decks/Reflection_Geometry.pptx
+++ b/docs/decks/Reflection_Geometry.pptx
@@ -3310,7 +3310,7 @@
                   <a:srgbClr val="999999"/>
                 </a:solidFill>
               </a:rPr>
-              <a:t>code v1.4  ·  2026-07-12  ·  1/11</a:t>
+              <a:t>code v1.5  ·  2026-07-13  ·  1/11</a:t>
             </a:r>
           </a:p>
         </p:txBody>
@@ -3599,7 +3599,7 @@
                   <a:srgbClr val="999999"/>
                 </a:solidFill>
               </a:rPr>
-              <a:t>code v1.4  ·  2026-07-12  ·  10/11</a:t>
+              <a:t>code v1.5  ·  2026-07-13  ·  10/11</a:t>
             </a:r>
           </a:p>
         </p:txBody>
@@ -3873,7 +3873,7 @@
                   <a:srgbClr val="999999"/>
                 </a:solidFill>
               </a:rPr>
-              <a:t>code v1.4  ·  2026-07-12  ·  11/11</a:t>
+              <a:t>code v1.5  ·  2026-07-13  ·  11/11</a:t>
             </a:r>
           </a:p>
         </p:txBody>
@@ -4162,7 +4162,7 @@
                   <a:srgbClr val="999999"/>
                 </a:solidFill>
               </a:rPr>
-              <a:t>code v1.4  ·  2026-07-12  ·  2/11</a:t>
+              <a:t>code v1.5  ·  2026-07-13  ·  2/11</a:t>
             </a:r>
           </a:p>
         </p:txBody>
@@ -4790,7 +4790,7 @@
                   <a:srgbClr val="999999"/>
                 </a:solidFill>
               </a:rPr>
-              <a:t>code v1.4  ·  2026-07-12  ·  3/11</a:t>
+              <a:t>code v1.5  ·  2026-07-13  ·  3/11</a:t>
             </a:r>
           </a:p>
         </p:txBody>
@@ -5094,7 +5094,7 @@
                   <a:srgbClr val="999999"/>
                 </a:solidFill>
               </a:rPr>
-              <a:t>code v1.4  ·  2026-07-12  ·  4/11</a:t>
+              <a:t>code v1.5  ·  2026-07-13  ·  4/11</a:t>
             </a:r>
           </a:p>
         </p:txBody>
@@ -5383,7 +5383,7 @@
                   <a:srgbClr val="999999"/>
                 </a:solidFill>
               </a:rPr>
-              <a:t>code v1.4  ·  2026-07-12  ·  5/11</a:t>
+              <a:t>code v1.5  ·  2026-07-13  ·  5/11</a:t>
             </a:r>
           </a:p>
         </p:txBody>
@@ -5672,7 +5672,7 @@
                   <a:srgbClr val="999999"/>
                 </a:solidFill>
               </a:rPr>
-              <a:t>code v1.4  ·  2026-07-12  ·  6/11</a:t>
+              <a:t>code v1.5  ·  2026-07-13  ·  6/11</a:t>
             </a:r>
           </a:p>
         </p:txBody>
@@ -5946,7 +5946,7 @@
                   <a:srgbClr val="999999"/>
                 </a:solidFill>
               </a:rPr>
-              <a:t>code v1.4  ·  2026-07-12  ·  7/11</a:t>
+              <a:t>code v1.5  ·  2026-07-13  ·  7/11</a:t>
             </a:r>
           </a:p>
         </p:txBody>
@@ -6235,7 +6235,7 @@
                   <a:srgbClr val="999999"/>
                 </a:solidFill>
               </a:rPr>
-              <a:t>code v1.4  ·  2026-07-12  ·  8/11</a:t>
+              <a:t>code v1.5  ·  2026-07-13  ·  8/11</a:t>
             </a:r>
           </a:p>
         </p:txBody>
@@ -6524,7 +6524,7 @@
                   <a:srgbClr val="999999"/>
                 </a:solidFill>
               </a:rPr>
-              <a:t>code v1.4  ·  2026-07-12  ·  9/11</a:t>
+              <a:t>code v1.5  ·  2026-07-13  ·  9/11</a:t>
             </a:r>
           </a:p>
         </p:txBody>
